--- a/deliverables/Arne_Ramos_AI_Capstone_Technical_Presentation.pptx
+++ b/deliverables/Arne_Ramos_AI_Capstone_Technical_Presentation.pptx
@@ -5522,7 +5522,7 @@
                   <a:srgbClr val="2A2A2A"/>
                 </a:solidFill>
               </a:rPr>
-              <a:t>0.51</a:t>
+              <a:t>0.505</a:t>
             </a:r>
             <a:r>
               <a:rPr sz="1500" b="0">
@@ -8836,7 +8836,7 @@
                   <a:srgbClr val="2A2A2A"/>
                 </a:solidFill>
               </a:rPr>
-              <a:t> — median score 0.35 against a 0.51 threshold, only 2% below 0.10, so the threshold is the dominant lever and borderline review genuinely helps</a:t>
+              <a:t> — median score 0.35 against a 0.505 threshold, only 2% below 0.10, so the threshold is the dominant lever and borderline review genuinely helps</a:t>
             </a:r>
           </a:p>
           <a:p>

--- a/deliverables/Arne_Ramos_AI_Capstone_Technical_Presentation.pptx
+++ b/deliverables/Arne_Ramos_AI_Capstone_Technical_Presentation.pptx
@@ -4520,7 +4520,7 @@
                   <a:srgbClr val="333333"/>
                 </a:solidFill>
               </a:rPr>
-              <a:t>•  Selected model: XGBoost — F1 0.9109, recall 91.12%, PR-AUC 0.9791</a:t>
+              <a:t>•  Selected model: LightGBM — F1 0.7890, recall 96.04%, PR-AUC 0.9485</a:t>
             </a:r>
           </a:p>
         </p:txBody>
@@ -4681,7 +4681,7 @@
               </a:spcAft>
             </a:pPr>
             <a:r>
-              <a:rPr sz="1500" b="0">
+              <a:rPr sz="1300" b="0">
                 <a:solidFill>
                   <a:srgbClr val="2A2A2A"/>
                 </a:solidFill>
@@ -4689,20 +4689,20 @@
               <a:t>•  </a:t>
             </a:r>
             <a:r>
-              <a:rPr sz="1500" b="1">
-                <a:solidFill>
-                  <a:srgbClr val="2A2A2A"/>
-                </a:solidFill>
-              </a:rPr>
-              <a:t>Duplicates retained → F1 +0.0498.</a:t>
-            </a:r>
-            <a:r>
-              <a:rPr sz="1500" b="0">
-                <a:solidFill>
-                  <a:srgbClr val="2A2A2A"/>
-                </a:solidFill>
-              </a:rPr>
-              <a:t> Skipping deduplication would have handed back a better-looking number for no better model</a:t>
+              <a:rPr sz="1300" b="1">
+                <a:solidFill>
+                  <a:srgbClr val="2A2A2A"/>
+                </a:solidFill>
+              </a:rPr>
+              <a:t>Pooled random split → F1 +0.1226.</a:t>
+            </a:r>
+            <a:r>
+              <a:rPr sz="1300" b="0">
+                <a:solidFill>
+                  <a:srgbClr val="2A2A2A"/>
+                </a:solidFill>
+              </a:rPr>
+              <a:t> The protocol most published results use. We report the harder published partition instead</a:t>
             </a:r>
           </a:p>
           <a:p>
@@ -4712,7 +4712,7 @@
               </a:spcAft>
             </a:pPr>
             <a:r>
-              <a:rPr sz="1500" b="0">
+              <a:rPr sz="1300" b="0">
                 <a:solidFill>
                   <a:srgbClr val="2A2A2A"/>
                 </a:solidFill>
@@ -4720,20 +4720,36 @@
               <a:t>•  </a:t>
             </a:r>
             <a:r>
-              <a:rPr sz="1500" b="1">
-                <a:solidFill>
-                  <a:srgbClr val="2A2A2A"/>
-                </a:solidFill>
-              </a:rPr>
-              <a:t>TTL removed → F1 +0.0003.</a:t>
-            </a:r>
-            <a:r>
-              <a:rPr sz="1500" b="0">
-                <a:solidFill>
-                  <a:srgbClr val="2A2A2A"/>
-                </a:solidFill>
-              </a:rPr>
-              <a:t> SHAP's top feature turns out to be redundant, not necessary — the model re-routes through correlated features</a:t>
+              <a:rPr sz="1300" b="1">
+                <a:solidFill>
+                  <a:srgbClr val="2A2A2A"/>
+                </a:solidFill>
+              </a:rPr>
+              <a:t>Duplicates retained → F1 +0.0507</a:t>
+            </a:r>
+            <a:r>
+              <a:rPr sz="1300" b="0">
+                <a:solidFill>
+                  <a:srgbClr val="2A2A2A"/>
+                </a:solidFill>
+              </a:rPr>
+              <a:t> (vs the pooled split)</a:t>
+            </a:r>
+            <a:r>
+              <a:rPr sz="1300" b="1">
+                <a:solidFill>
+                  <a:srgbClr val="2A2A2A"/>
+                </a:solidFill>
+              </a:rPr>
+              <a:t>.</a:t>
+            </a:r>
+            <a:r>
+              <a:rPr sz="1300" b="0">
+                <a:solidFill>
+                  <a:srgbClr val="2A2A2A"/>
+                </a:solidFill>
+              </a:rPr>
+              <a:t> Skipping deduplication hands back a better-looking number for no better model</a:t>
             </a:r>
           </a:p>
           <a:p>
@@ -4743,7 +4759,7 @@
               </a:spcAft>
             </a:pPr>
             <a:r>
-              <a:rPr sz="1500" b="0">
+              <a:rPr sz="1300" b="0">
                 <a:solidFill>
                   <a:srgbClr val="2A2A2A"/>
                 </a:solidFill>
@@ -4751,20 +4767,20 @@
               <a:t>•  </a:t>
             </a:r>
             <a:r>
-              <a:rPr sz="1500" b="1">
-                <a:solidFill>
-                  <a:srgbClr val="2A2A2A"/>
-                </a:solidFill>
-              </a:rPr>
-              <a:t>No engineered features → F1 +0.0010.</a:t>
-            </a:r>
-            <a:r>
-              <a:rPr sz="1500" b="0">
-                <a:solidFill>
-                  <a:srgbClr val="2A2A2A"/>
-                </a:solidFill>
-              </a:rPr>
-              <a:t> The 15 domain features buy interpretability, not accuracy — reported as the negative result it is</a:t>
+              <a:rPr sz="1300" b="1">
+                <a:solidFill>
+                  <a:srgbClr val="2A2A2A"/>
+                </a:solidFill>
+              </a:rPr>
+              <a:t>TTL removed → F1 -0.0089.</a:t>
+            </a:r>
+            <a:r>
+              <a:rPr sz="1300" b="0">
+                <a:solidFill>
+                  <a:srgbClr val="2A2A2A"/>
+                </a:solidFill>
+              </a:rPr>
+              <a:t> SHAP's top feature is used far more than it is needed — the model re-routes through correlated features</a:t>
             </a:r>
           </a:p>
           <a:p>
@@ -4774,7 +4790,7 @@
               </a:spcAft>
             </a:pPr>
             <a:r>
-              <a:rPr sz="1500" b="0">
+              <a:rPr sz="1300" b="0">
                 <a:solidFill>
                   <a:srgbClr val="2A2A2A"/>
                 </a:solidFill>
@@ -4782,20 +4798,20 @@
               <a:t>•  </a:t>
             </a:r>
             <a:r>
-              <a:rPr sz="1500" b="1">
-                <a:solidFill>
-                  <a:srgbClr val="2A2A2A"/>
-                </a:solidFill>
-              </a:rPr>
-              <a:t>SMOTE → F1 -0.0005.</a:t>
-            </a:r>
-            <a:r>
-              <a:rPr sz="1500" b="0">
-                <a:solidFill>
-                  <a:srgbClr val="2A2A2A"/>
-                </a:solidFill>
-              </a:rPr>
-              <a:t> Tested rather than assumed, and not adopted</a:t>
+              <a:rPr sz="1300" b="1">
+                <a:solidFill>
+                  <a:srgbClr val="2A2A2A"/>
+                </a:solidFill>
+              </a:rPr>
+              <a:t>No engineered features → F1 +0.0035.</a:t>
+            </a:r>
+            <a:r>
+              <a:rPr sz="1300" b="0">
+                <a:solidFill>
+                  <a:srgbClr val="2A2A2A"/>
+                </a:solidFill>
+              </a:rPr>
+              <a:t> The 15 domain features buy interpretability, not accuracy — reported as the negative result it is</a:t>
             </a:r>
           </a:p>
           <a:p>
@@ -4805,7 +4821,7 @@
               </a:spcAft>
             </a:pPr>
             <a:r>
-              <a:rPr sz="1500" b="0">
+              <a:rPr sz="1300" b="0">
                 <a:solidFill>
                   <a:srgbClr val="2A2A2A"/>
                 </a:solidFill>
@@ -4813,20 +4829,51 @@
               <a:t>•  </a:t>
             </a:r>
             <a:r>
-              <a:rPr sz="1500" b="1">
-                <a:solidFill>
-                  <a:srgbClr val="2A2A2A"/>
-                </a:solidFill>
-              </a:rPr>
-              <a:t>Published split → precision 0.911 → 0.807.</a:t>
-            </a:r>
-            <a:r>
-              <a:rPr sz="1500" b="0">
-                <a:solidFill>
-                  <a:srgbClr val="2A2A2A"/>
-                </a:solidFill>
-              </a:rPr>
-              <a:t> Same model, different partition, different detector</a:t>
+              <a:rPr sz="1300" b="1">
+                <a:solidFill>
+                  <a:srgbClr val="2A2A2A"/>
+                </a:solidFill>
+              </a:rPr>
+              <a:t>SMOTE → F1 -0.0027.</a:t>
+            </a:r>
+            <a:r>
+              <a:rPr sz="1300" b="0">
+                <a:solidFill>
+                  <a:srgbClr val="2A2A2A"/>
+                </a:solidFill>
+              </a:rPr>
+              <a:t> Tested rather than assumed, and not adopted</a:t>
+            </a:r>
+          </a:p>
+          <a:p>
+            <a:pPr>
+              <a:spcAft>
+                <a:spcPts val="800"/>
+              </a:spcAft>
+            </a:pPr>
+            <a:r>
+              <a:rPr sz="1300" b="0">
+                <a:solidFill>
+                  <a:srgbClr val="2A2A2A"/>
+                </a:solidFill>
+              </a:rPr>
+              <a:t>•  </a:t>
+            </a:r>
+            <a:r>
+              <a:rPr sz="1300" b="1">
+                <a:solidFill>
+                  <a:srgbClr val="2A2A2A"/>
+                </a:solidFill>
+              </a:rPr>
+              <a:t>Partition as distributed → F1 +0.1017.</a:t>
+            </a:r>
+            <a:r>
+              <a:rPr sz="1300" b="0">
+                <a:solidFill>
+                  <a:srgbClr val="2A2A2A"/>
+                </a:solidFill>
+              </a:rPr>
+              <a:t> What the two cleaning steps (dedup each side, remove train/test overlap) are worth</a:t>
             </a:r>
           </a:p>
         </p:txBody>
@@ -4841,7 +4888,7 @@
         </p:nvGraphicFramePr>
         <p:xfrm>
           <a:off x="566928" y="3886200"/>
-          <a:ext cx="5577840" cy="2048256"/>
+          <a:ext cx="5577840" cy="2340864"/>
         </p:xfrm>
         <a:graphic>
           <a:graphicData uri="http://schemas.openxmlformats.org/drawingml/2006/table">
@@ -4938,7 +4985,7 @@
                       <a:pPr algn="l"/>
                       <a:r>
                         <a:rPr sz="1000"/>
-                        <a:t>Primary protocol</a:t>
+                        <a:t>Primary protocol (published partition)</a:t>
                       </a:r>
                     </a:p>
                   </a:txBody>
@@ -4952,7 +4999,7 @@
                       <a:pPr algn="l"/>
                       <a:r>
                         <a:rPr sz="1000"/>
-                        <a:t>0.9112</a:t>
+                        <a:t>0.9604</a:t>
                       </a:r>
                     </a:p>
                   </a:txBody>
@@ -4966,7 +5013,7 @@
                       <a:pPr algn="l"/>
                       <a:r>
                         <a:rPr sz="1000"/>
-                        <a:t>0.9109</a:t>
+                        <a:t>0.7890</a:t>
                       </a:r>
                     </a:p>
                   </a:txBody>
@@ -4980,7 +5027,7 @@
                       <a:pPr algn="l"/>
                       <a:r>
                         <a:rPr sz="1000"/>
-                        <a:t>0.9791</a:t>
+                        <a:t>0.9485</a:t>
                       </a:r>
                     </a:p>
                   </a:txBody>
@@ -4996,7 +5043,7 @@
                       <a:pPr algn="l"/>
                       <a:r>
                         <a:rPr sz="1000"/>
-                        <a:t>Duplicates kept</a:t>
+                        <a:t>Pooled random split</a:t>
                       </a:r>
                     </a:p>
                   </a:txBody>
@@ -5010,7 +5057,7 @@
                       <a:pPr algn="l"/>
                       <a:r>
                         <a:rPr sz="1000"/>
-                        <a:t>0.9630</a:t>
+                        <a:t>0.9022</a:t>
                       </a:r>
                     </a:p>
                   </a:txBody>
@@ -5024,7 +5071,7 @@
                       <a:pPr algn="l"/>
                       <a:r>
                         <a:rPr sz="1000"/>
-                        <a:t>0.9607</a:t>
+                        <a:t>0.9116</a:t>
                       </a:r>
                     </a:p>
                   </a:txBody>
@@ -5038,7 +5085,7 @@
                       <a:pPr algn="l"/>
                       <a:r>
                         <a:rPr sz="1000"/>
-                        <a:t>0.9957</a:t>
+                        <a:t>0.9793</a:t>
                       </a:r>
                     </a:p>
                   </a:txBody>
@@ -5054,7 +5101,7 @@
                       <a:pPr algn="l"/>
                       <a:r>
                         <a:rPr sz="1000"/>
-                        <a:t>TTL removed</a:t>
+                        <a:t>Duplicates retained</a:t>
                       </a:r>
                     </a:p>
                   </a:txBody>
@@ -5068,7 +5115,7 @@
                       <a:pPr algn="l"/>
                       <a:r>
                         <a:rPr sz="1000"/>
-                        <a:t>0.9075</a:t>
+                        <a:t>0.9516</a:t>
                       </a:r>
                     </a:p>
                   </a:txBody>
@@ -5082,7 +5129,7 @@
                       <a:pPr algn="l"/>
                       <a:r>
                         <a:rPr sz="1000"/>
-                        <a:t>0.9111</a:t>
+                        <a:t>0.9623</a:t>
                       </a:r>
                     </a:p>
                   </a:txBody>
@@ -5096,7 +5143,7 @@
                       <a:pPr algn="l"/>
                       <a:r>
                         <a:rPr sz="1000"/>
-                        <a:t>0.9789</a:t>
+                        <a:t>0.9959</a:t>
                       </a:r>
                     </a:p>
                   </a:txBody>
@@ -5112,7 +5159,7 @@
                       <a:pPr algn="l"/>
                       <a:r>
                         <a:rPr sz="1000"/>
-                        <a:t>No engineered features</a:t>
+                        <a:t>TTL features removed</a:t>
                       </a:r>
                     </a:p>
                   </a:txBody>
@@ -5126,7 +5173,7 @@
                       <a:pPr algn="l"/>
                       <a:r>
                         <a:rPr sz="1000"/>
-                        <a:t>0.9158</a:t>
+                        <a:t>0.9606</a:t>
                       </a:r>
                     </a:p>
                   </a:txBody>
@@ -5140,7 +5187,7 @@
                       <a:pPr algn="l"/>
                       <a:r>
                         <a:rPr sz="1000"/>
-                        <a:t>0.9118</a:t>
+                        <a:t>0.7801</a:t>
                       </a:r>
                     </a:p>
                   </a:txBody>
@@ -5154,7 +5201,7 @@
                       <a:pPr algn="l"/>
                       <a:r>
                         <a:rPr sz="1000"/>
-                        <a:t>0.9794</a:t>
+                        <a:t>0.9441</a:t>
                       </a:r>
                     </a:p>
                   </a:txBody>
@@ -5170,7 +5217,7 @@
                       <a:pPr algn="l"/>
                       <a:r>
                         <a:rPr sz="1000"/>
-                        <a:t>SMOTE</a:t>
+                        <a:t>Engineered features removed</a:t>
                       </a:r>
                     </a:p>
                   </a:txBody>
@@ -5184,7 +5231,7 @@
                       <a:pPr algn="l"/>
                       <a:r>
                         <a:rPr sz="1000"/>
-                        <a:t>0.9124</a:t>
+                        <a:t>0.9625</a:t>
                       </a:r>
                     </a:p>
                   </a:txBody>
@@ -5198,7 +5245,7 @@
                       <a:pPr algn="l"/>
                       <a:r>
                         <a:rPr sz="1000"/>
-                        <a:t>0.9103</a:t>
+                        <a:t>0.7925</a:t>
                       </a:r>
                     </a:p>
                   </a:txBody>
@@ -5212,7 +5259,7 @@
                       <a:pPr algn="l"/>
                       <a:r>
                         <a:rPr sz="1000"/>
-                        <a:t>0.9789</a:t>
+                        <a:t>0.9484</a:t>
                       </a:r>
                     </a:p>
                   </a:txBody>
@@ -5228,7 +5275,7 @@
                       <a:pPr algn="l"/>
                       <a:r>
                         <a:rPr sz="1000"/>
-                        <a:t>Published split</a:t>
+                        <a:t>SMOTE instead of class weights</a:t>
                       </a:r>
                     </a:p>
                   </a:txBody>
@@ -5242,7 +5289,7 @@
                       <a:pPr algn="l"/>
                       <a:r>
                         <a:rPr sz="1000"/>
-                        <a:t>0.9868</a:t>
+                        <a:t>0.9652</a:t>
                       </a:r>
                     </a:p>
                   </a:txBody>
@@ -5256,7 +5303,7 @@
                       <a:pPr algn="l"/>
                       <a:r>
                         <a:rPr sz="1000"/>
-                        <a:t>0.8881</a:t>
+                        <a:t>0.7863</a:t>
                       </a:r>
                     </a:p>
                   </a:txBody>
@@ -5270,7 +5317,65 @@
                       <a:pPr algn="l"/>
                       <a:r>
                         <a:rPr sz="1000"/>
-                        <a:t>0.9885</a:t>
+                        <a:t>0.9486</a:t>
+                      </a:r>
+                    </a:p>
+                  </a:txBody>
+                  <a:tcPr/>
+                </a:tc>
+              </a:tr>
+              <a:tr h="292608">
+                <a:tc>
+                  <a:txBody>
+                    <a:bodyPr/>
+                    <a:lstStyle/>
+                    <a:p>
+                      <a:pPr algn="l"/>
+                      <a:r>
+                        <a:rPr sz="1000"/>
+                        <a:t>Published partition, as distributed</a:t>
+                      </a:r>
+                    </a:p>
+                  </a:txBody>
+                  <a:tcPr/>
+                </a:tc>
+                <a:tc>
+                  <a:txBody>
+                    <a:bodyPr/>
+                    <a:lstStyle/>
+                    <a:p>
+                      <a:pPr algn="l"/>
+                      <a:r>
+                        <a:rPr sz="1000"/>
+                        <a:t>0.9799</a:t>
+                      </a:r>
+                    </a:p>
+                  </a:txBody>
+                  <a:tcPr/>
+                </a:tc>
+                <a:tc>
+                  <a:txBody>
+                    <a:bodyPr/>
+                    <a:lstStyle/>
+                    <a:p>
+                      <a:pPr algn="l"/>
+                      <a:r>
+                        <a:rPr sz="1000"/>
+                        <a:t>0.8907</a:t>
+                      </a:r>
+                    </a:p>
+                  </a:txBody>
+                  <a:tcPr/>
+                </a:tc>
+                <a:tc>
+                  <a:txBody>
+                    <a:bodyPr/>
+                    <a:lstStyle/>
+                    <a:p>
+                      <a:pPr algn="l"/>
+                      <a:r>
+                        <a:rPr sz="1000"/>
+                        <a:t>0.9872</a:t>
                       </a:r>
                     </a:p>
                   </a:txBody>
@@ -5298,7 +5403,7 @@
         <p:spPr>
           <a:xfrm>
             <a:off x="6355080" y="1463040"/>
-            <a:ext cx="5269687" cy="2570510"/>
+            <a:ext cx="5269687" cy="2184771"/>
           </a:xfrm>
           <a:prstGeom prst="rect">
             <a:avLst/>
@@ -5522,7 +5627,7 @@
                   <a:srgbClr val="2A2A2A"/>
                 </a:solidFill>
               </a:rPr>
-              <a:t>0.505</a:t>
+              <a:t>0.465</a:t>
             </a:r>
             <a:r>
               <a:rPr sz="1500" b="0">
@@ -5584,7 +5689,7 @@
                   <a:srgbClr val="2A2A2A"/>
                 </a:solidFill>
               </a:rPr>
-              <a:t>195,353 flows/second</a:t>
+              <a:t>82,396 flows/second</a:t>
             </a:r>
             <a:r>
               <a:rPr sz="1500" b="0">
@@ -5822,7 +5927,7 @@
                   <a:srgbClr val="2A2A2A"/>
                 </a:solidFill>
               </a:rPr>
-              <a:t> F1 0.9109, ROC-AUC 0.9824, PR-AUC 0.9791, recall 91.12%, FPR 7.142% — all pre-registered targets met</a:t>
+              <a:t> F1 0.7890, ROC-AUC 0.9648, PR-AUC 0.9485, recall 96.04%, FPR 26.736% — 3/4 pre-registered targets met on this harder protocol (F1 short); all met on the pooled random split</a:t>
             </a:r>
           </a:p>
           <a:p>
@@ -5853,7 +5958,7 @@
                   <a:srgbClr val="2A2A2A"/>
                 </a:solidFill>
               </a:rPr>
-              <a:t> a capture artefact the model uses but does not need (shown by ablation, not assumed), uneven per-family recall, and precision that will not transfer to a production base rate</a:t>
+              <a:t> a capture artefact the model leans on far more than it needs (measured by ablation, not assumed), uneven per-family recall, and precision that will not transfer to a production base rate</a:t>
             </a:r>
           </a:p>
           <a:p>
@@ -7611,7 +7716,7 @@
                   <a:srgbClr val="2A2A2A"/>
                 </a:solidFill>
               </a:rPr>
-              <a:t>XGBoost</a:t>
+              <a:t>LightGBM</a:t>
             </a:r>
             <a:r>
               <a:rPr sz="1500" b="0">
@@ -7650,7 +7755,7 @@
                   <a:srgbClr val="2A2A2A"/>
                 </a:solidFill>
               </a:rPr>
-              <a:t>Accuracy compresses every model into a narrow band on a 44%-positive corpus and rewards majority-class performance</a:t>
+              <a:t>Accuracy compresses every model into a narrow band on a 36%-positive corpus and rewards majority-class performance</a:t>
             </a:r>
           </a:p>
         </p:txBody>
@@ -7814,7 +7919,7 @@
                       <a:pPr algn="l"/>
                       <a:r>
                         <a:rPr sz="1000"/>
-                        <a:t>0.9134</a:t>
+                        <a:t>0.9517</a:t>
                       </a:r>
                     </a:p>
                   </a:txBody>
@@ -7828,7 +7933,7 @@
                       <a:pPr algn="l"/>
                       <a:r>
                         <a:rPr sz="1000"/>
-                        <a:t>0.8106</a:t>
+                        <a:t>0.5901</a:t>
                       </a:r>
                     </a:p>
                   </a:txBody>
@@ -7842,7 +7947,7 @@
                       <a:pPr algn="l"/>
                       <a:r>
                         <a:rPr sz="1000"/>
-                        <a:t>0.8590</a:t>
+                        <a:t>0.7285</a:t>
                       </a:r>
                     </a:p>
                   </a:txBody>
@@ -7856,7 +7961,7 @@
                       <a:pPr algn="l"/>
                       <a:r>
                         <a:rPr sz="1000"/>
-                        <a:t>0.9415</a:t>
+                        <a:t>0.8789</a:t>
                       </a:r>
                     </a:p>
                   </a:txBody>
@@ -7870,7 +7975,7 @@
                       <a:pPr algn="l"/>
                       <a:r>
                         <a:rPr sz="1000"/>
-                        <a:t>17.028%</a:t>
+                        <a:t>37.273%</a:t>
                       </a:r>
                     </a:p>
                   </a:txBody>
@@ -7900,7 +8005,7 @@
                       <a:pPr algn="l"/>
                       <a:r>
                         <a:rPr sz="1000"/>
-                        <a:t>0.9137</a:t>
+                        <a:t>0.9752</a:t>
                       </a:r>
                     </a:p>
                   </a:txBody>
@@ -7914,7 +8019,7 @@
                       <a:pPr algn="l"/>
                       <a:r>
                         <a:rPr sz="1000"/>
-                        <a:t>0.9010</a:t>
+                        <a:t>0.6784</a:t>
                       </a:r>
                     </a:p>
                   </a:txBody>
@@ -7928,7 +8033,7 @@
                       <a:pPr algn="l"/>
                       <a:r>
                         <a:rPr sz="1000"/>
-                        <a:t>0.9073</a:t>
+                        <a:t>0.8002</a:t>
                       </a:r>
                     </a:p>
                   </a:txBody>
@@ -7942,7 +8047,7 @@
                       <a:pPr algn="l"/>
                       <a:r>
                         <a:rPr sz="1000"/>
-                        <a:t>0.9773</a:t>
+                        <a:t>0.9493</a:t>
                       </a:r>
                     </a:p>
                   </a:txBody>
@@ -7956,7 +8061,7 @@
                       <a:pPr algn="l"/>
                       <a:r>
                         <a:rPr sz="1000"/>
-                        <a:t>8.008%</a:t>
+                        <a:t>26.068%</a:t>
                       </a:r>
                     </a:p>
                   </a:txBody>
@@ -7986,7 +8091,7 @@
                       <a:pPr algn="l"/>
                       <a:r>
                         <a:rPr sz="1000"/>
-                        <a:t>0.9112</a:t>
+                        <a:t>0.9622</a:t>
                       </a:r>
                     </a:p>
                   </a:txBody>
@@ -8000,7 +8105,7 @@
                       <a:pPr algn="l"/>
                       <a:r>
                         <a:rPr sz="1000"/>
-                        <a:t>0.9106</a:t>
+                        <a:t>0.6800</a:t>
                       </a:r>
                     </a:p>
                   </a:txBody>
@@ -8014,7 +8119,7 @@
                       <a:pPr algn="l"/>
                       <a:r>
                         <a:rPr sz="1000"/>
-                        <a:t>0.9109</a:t>
+                        <a:t>0.7968</a:t>
                       </a:r>
                     </a:p>
                   </a:txBody>
@@ -8028,7 +8133,7 @@
                       <a:pPr algn="l"/>
                       <a:r>
                         <a:rPr sz="1000"/>
-                        <a:t>0.9791</a:t>
+                        <a:t>0.9526</a:t>
                       </a:r>
                     </a:p>
                   </a:txBody>
@@ -8042,7 +8147,7 @@
                       <a:pPr algn="l"/>
                       <a:r>
                         <a:rPr sz="1000"/>
-                        <a:t>7.142%</a:t>
+                        <a:t>25.536%</a:t>
                       </a:r>
                     </a:p>
                   </a:txBody>
@@ -8072,7 +8177,7 @@
                       <a:pPr algn="l"/>
                       <a:r>
                         <a:rPr sz="1000"/>
-                        <a:t>0.9134</a:t>
+                        <a:t>0.9604</a:t>
                       </a:r>
                     </a:p>
                   </a:txBody>
@@ -8086,7 +8191,7 @@
                       <a:pPr algn="l"/>
                       <a:r>
                         <a:rPr sz="1000"/>
-                        <a:t>0.9089</a:t>
+                        <a:t>0.6695</a:t>
                       </a:r>
                     </a:p>
                   </a:txBody>
@@ -8100,7 +8205,7 @@
                       <a:pPr algn="l"/>
                       <a:r>
                         <a:rPr sz="1000"/>
-                        <a:t>0.9112</a:t>
+                        <a:t>0.7890</a:t>
                       </a:r>
                     </a:p>
                   </a:txBody>
@@ -8114,7 +8219,7 @@
                       <a:pPr algn="l"/>
                       <a:r>
                         <a:rPr sz="1000"/>
-                        <a:t>0.9791</a:t>
+                        <a:t>0.9485</a:t>
                       </a:r>
                     </a:p>
                   </a:txBody>
@@ -8128,7 +8233,7 @@
                       <a:pPr algn="l"/>
                       <a:r>
                         <a:rPr sz="1000"/>
-                        <a:t>7.306%</a:t>
+                        <a:t>26.736%</a:t>
                       </a:r>
                     </a:p>
                   </a:txBody>
@@ -8158,7 +8263,7 @@
                       <a:pPr algn="l"/>
                       <a:r>
                         <a:rPr sz="1000"/>
-                        <a:t>0.2199</a:t>
+                        <a:t>0.3265</a:t>
                       </a:r>
                     </a:p>
                   </a:txBody>
@@ -8172,7 +8277,7 @@
                       <a:pPr algn="l"/>
                       <a:r>
                         <a:rPr sz="1000"/>
-                        <a:t>0.6719</a:t>
+                        <a:t>0.5164</a:t>
                       </a:r>
                     </a:p>
                   </a:txBody>
@@ -8186,7 +8291,7 @@
                       <a:pPr algn="l"/>
                       <a:r>
                         <a:rPr sz="1000"/>
-                        <a:t>0.3314</a:t>
+                        <a:t>0.4001</a:t>
                       </a:r>
                     </a:p>
                   </a:txBody>
@@ -8200,7 +8305,7 @@
                       <a:pPr algn="l"/>
                       <a:r>
                         <a:rPr sz="1000"/>
-                        <a:t>0.5912</a:t>
+                        <a:t>0.5047</a:t>
                       </a:r>
                     </a:p>
                   </a:txBody>
@@ -8214,7 +8319,7 @@
                       <a:pPr algn="l"/>
                       <a:r>
                         <a:rPr sz="1000"/>
-                        <a:t>8.570%</a:t>
+                        <a:t>17.242%</a:t>
                       </a:r>
                     </a:p>
                   </a:txBody>
@@ -8442,7 +8547,7 @@
                   <a:srgbClr val="2A2A2A"/>
                 </a:solidFill>
               </a:rPr>
-              <a:t>Top drivers: sttl, ct_dst_src_ltm, ct_state_ttl, dbytes, service_dns</a:t>
+              <a:t>Top drivers: sttl, ct_state_ttl, ct_srv_dst, ct_dst_src_ltm, dttl</a:t>
             </a:r>
           </a:p>
           <a:p>
@@ -8535,7 +8640,7 @@
                   <a:srgbClr val="2A2A2A"/>
                 </a:solidFill>
               </a:rPr>
-              <a:t> the TTL family carries 54% of total attributed impact</a:t>
+              <a:t> the TTL family carries 53% of total attributed impact</a:t>
             </a:r>
           </a:p>
         </p:txBody>
@@ -8734,7 +8839,7 @@
                   <a:srgbClr val="2A2A2A"/>
                 </a:solidFill>
               </a:rPr>
-              <a:t>Recall varies substantially by attack family; weakest: Analysis (59%), Fuzzers (74%), Shellcode (96%), Exploits (98%)</a:t>
+              <a:t>Recall varies substantially by attack family; weakest: Fuzzers (84%), Analysis (97%), Shellcode (99%), Exploits (99%)</a:t>
             </a:r>
           </a:p>
           <a:p>
@@ -8836,7 +8941,7 @@
                   <a:srgbClr val="2A2A2A"/>
                 </a:solidFill>
               </a:rPr>
-              <a:t> — median score 0.35 against a 0.505 threshold, only 2% below 0.10, so the threshold is the dominant lever and borderline review genuinely helps</a:t>
+              <a:t> — median score 0.27 against a 0.465 threshold, only 17% below 0.10, so the threshold is the dominant lever and borderline review genuinely helps</a:t>
             </a:r>
           </a:p>
           <a:p>
@@ -8912,7 +9017,7 @@
         <p:spPr>
           <a:xfrm>
             <a:off x="6355080" y="1463040"/>
-            <a:ext cx="5269687" cy="2158017"/>
+            <a:ext cx="5269687" cy="2198425"/>
           </a:xfrm>
           <a:prstGeom prst="rect">
             <a:avLst/>
